--- a/week-08/presentations/ppts/day-01-ai-spec-development.pptx
+++ b/week-08/presentations/ppts/day-01-ai-spec-development.pptx
@@ -544,7 +544,7 @@
             </a:pPr>
             <a:r>
               <a:rPr/>
-              <a:t>Welcome to Week 8. Capstone week. Today: install the new AI Spec Development pattern + confirm your real-world capstone subject.</a:t>
+              <a:t>Welcome to Week 8. Capstone week. Today: install the new AI Spec Development pattern + confirm your capstone subject.</a:t>
             </a:r>
           </a:p>
         </p:txBody>
@@ -7079,7 +7079,7 @@
             </a:pPr>
             <a:r>
               <a:rPr/>
-              <a:t>Is it different enough from FieldPulse to test transferability?</a:t>
+              <a:t>Can you state the core problem in one sentence an engineer could scope from?</a:t>
             </a:r>
           </a:p>
           <a:p>

--- a/week-08/presentations/ppts/day-01-ai-spec-development.pptx
+++ b/week-08/presentations/ppts/day-01-ai-spec-development.pptx
@@ -5504,7 +5504,7 @@
             </a:pPr>
             <a:r>
               <a:rPr/>
-              <a:t>🧿 The Sequence</a:t>
+              <a:t>🤖 The Sequence</a:t>
             </a:r>
           </a:p>
         </p:txBody>
@@ -5574,7 +5574,7 @@
             </a:pPr>
             <a:r>
               <a:rPr/>
-              <a:t>PRD §§1–5, TCD §1, TMD §3</a:t>
+              <a:t>PRD Sections 1–5, TCD Section 1, TMD Section 3</a:t>
             </a:r>
           </a:p>
           <a:p>
@@ -5601,7 +5601,7 @@
             </a:pPr>
             <a:r>
               <a:rPr/>
-              <a:t>TMD §1 + TMD §3</a:t>
+              <a:t>TMD Section 1 + TMD Section 3</a:t>
             </a:r>
           </a:p>
           <a:p>
@@ -5628,7 +5628,7 @@
             </a:pPr>
             <a:r>
               <a:rPr/>
-              <a:t>TMD §4</a:t>
+              <a:t>TMD Section 4</a:t>
             </a:r>
           </a:p>
           <a:p>
@@ -5655,7 +5655,7 @@
             </a:pPr>
             <a:r>
               <a:rPr/>
-              <a:t>TCD §3 + TCD §4 + PRD §7</a:t>
+              <a:t>TCD Section 3 + TCD Section 4 + PRD Section 7</a:t>
             </a:r>
           </a:p>
           <a:p>
@@ -5682,7 +5682,7 @@
             </a:pPr>
             <a:r>
               <a:rPr/>
-              <a:t>TCD §5 + TCD §6 + SEP §1</a:t>
+              <a:t>TCD Section 5 + TCD Section 6 + SEP Section 1</a:t>
             </a:r>
           </a:p>
           <a:p>
@@ -6140,7 +6140,7 @@
             </a:pPr>
             <a:r>
               <a:rPr/>
-              <a:t>🧿 Capstone Plan AI Check</a:t>
+              <a:t>🤖 Capstone Plan AI Check</a:t>
             </a:r>
           </a:p>
         </p:txBody>

--- a/week-08/presentations/ppts/day-01-ai-spec-development.pptx
+++ b/week-08/presentations/ppts/day-01-ai-spec-development.pptx
@@ -6689,7 +6689,7 @@
             </a:pPr>
             <a:r>
               <a:rPr/>
-              <a:t>Plan the discovery work needed before tomorrow’s compressed PRD</a:t>
+              <a:t>Plan the discovery work needed before tomorrow’s compressed Product Requirements Document (PRD)</a:t>
             </a:r>
           </a:p>
         </p:txBody>
@@ -7499,7 +7499,7 @@
             </a:pPr>
             <a:r>
               <a:rPr/>
-              <a:t>Senior TPMs use this to draft, not to think. Judgment shapes every section; AI accelerates the typing.</a:t>
+              <a:t>Senior TPMs use this to draft, not to think. Judgment shapes every section; AI accelerates the typing. Its inputs: the Technical Concept Document (TCD), Technical Modeling Document (TMD), Stakeholder Engagement Plan (SEP), and Delivery Plan (DP).</a:t>
             </a:r>
           </a:p>
         </p:txBody>

--- a/week-08/presentations/ppts/day-01-ai-spec-development.pptx
+++ b/week-08/presentations/ppts/day-01-ai-spec-development.pptx
@@ -544,7 +544,7 @@
             </a:pPr>
             <a:r>
               <a:rPr/>
-              <a:t>Welcome to Week 8. Capstone week. Today: install the new AI Spec Development pattern + confirm your capstone subject.</a:t>
+              <a:t>Welcome to Week 8. Capstone week. Today: install the new AI Spec Development pattern + lock your Holocron scope slice.</a:t>
             </a:r>
           </a:p>
         </p:txBody>
@@ -1282,7 +1282,7 @@
             </a:pPr>
             <a:r>
               <a:rPr/>
-              <a:t>Wrap-share: capstone subject in one sentence, struggle section, AI risk.</a:t>
+              <a:t>Wrap-share: Holocron problem + scope line in one sentence, struggle section, AI risk.</a:t>
             </a:r>
           </a:p>
         </p:txBody>
@@ -1446,7 +1446,7 @@
             </a:pPr>
             <a:r>
               <a:rPr/>
-              <a:t>By 16:00, every triad has the AI Spec pattern installed + a confirmed capstone subject + a discovery plan.</a:t>
+              <a:t>By 16:00, every triad has the AI Spec pattern installed + a locked Holocron scope slice + a discovery plan.</a:t>
             </a:r>
           </a:p>
         </p:txBody>
@@ -1692,7 +1692,7 @@
             </a:pPr>
             <a:r>
               <a:rPr/>
-              <a:t>Frame the block: 5 questions; refine or commit. Set context briefly, then move into the teaching content.</a:t>
+              <a:t>Frame the block: 5 questions; narrow the slice or commit. Set context briefly, then move into the teaching content.</a:t>
             </a:r>
           </a:p>
         </p:txBody>
@@ -1774,7 +1774,7 @@
             </a:pPr>
             <a:r>
               <a:rPr/>
-              <a:t>Don’t soften this. Better to refine subject Day 1 than ship a thin capstone Friday.</a:t>
+              <a:t>Don’t soften this. Better to narrow the slice Day 1 than ship a thin capstone Friday.</a:t>
             </a:r>
           </a:p>
         </p:txBody>
@@ -6452,7 +6452,7 @@
             </a:pPr>
             <a:r>
               <a:rPr/>
-              <a:t>Confirmed capstone subject</a:t>
+              <a:t>Locked Holocron scope slice</a:t>
             </a:r>
           </a:p>
           <a:p>
@@ -6680,7 +6680,7 @@
             </a:pPr>
             <a:r>
               <a:rPr/>
-              <a:t>Confirm the capstone subject through the 5-question fit test</a:t>
+              <a:t>Lock the Holocron scope slice through the 5-question scoping test</a:t>
             </a:r>
           </a:p>
           <a:p>
@@ -6806,7 +6806,7 @@
             </a:pPr>
             <a:r>
               <a:rPr/>
-              <a:t>Pin the 5-artifact set + capstone candidates</a:t>
+              <a:t>Pin the 5-artifact set + the Holocron brief</a:t>
             </a:r>
           </a:p>
           <a:p>
@@ -7036,7 +7036,7 @@
             </a:pPr>
             <a:r>
               <a:rPr/>
-              <a:t>🎯 The 5 Capstone-Fit Questions</a:t>
+              <a:t>🎯 The 5 Scoping Questions</a:t>
             </a:r>
           </a:p>
         </p:txBody>
@@ -7061,34 +7061,34 @@
             </a:pPr>
             <a:r>
               <a:rPr/>
-              <a:t>Do we have a real customer? (interviews / observation / data)</a:t>
-            </a:r>
-          </a:p>
-          <a:p>
-            <a:pPr lvl="0" indent="0" marL="0">
-              <a:buNone/>
-            </a:pPr>
-            <a:r>
-              <a:rPr/>
-              <a:t>Is the scope substantive enough?</a:t>
-            </a:r>
-          </a:p>
-          <a:p>
-            <a:pPr lvl="0" indent="0" marL="0">
-              <a:buNone/>
-            </a:pPr>
-            <a:r>
-              <a:rPr/>
-              <a:t>Can you state the core problem in one sentence an engineer could scope from?</a:t>
-            </a:r>
-          </a:p>
-          <a:p>
-            <a:pPr lvl="0" indent="0" marL="0">
-              <a:buNone/>
-            </a:pPr>
-            <a:r>
-              <a:rPr/>
-              <a:t>Can we discuss it publicly?</a:t>
+              <a:t>Can you state the problem in one sentence an engineer could scope from?</a:t>
+            </a:r>
+          </a:p>
+          <a:p>
+            <a:pPr lvl="0" indent="0" marL="0">
+              <a:buNone/>
+            </a:pPr>
+            <a:r>
+              <a:rPr/>
+              <a:t>Who is it for first — and why them?</a:t>
+            </a:r>
+          </a:p>
+          <a:p>
+            <a:pPr lvl="0" indent="0" marL="0">
+              <a:buNone/>
+            </a:pPr>
+            <a:r>
+              <a:rPr/>
+              <a:t>Is the slice substantive but bounded?</a:t>
+            </a:r>
+          </a:p>
+          <a:p>
+            <a:pPr lvl="0" indent="0" marL="0">
+              <a:buNone/>
+            </a:pPr>
+            <a:r>
+              <a:rPr/>
+              <a:t>Evidence, not invention — does every claim trace to the brief?</a:t>
             </a:r>
           </a:p>
           <a:p>
@@ -7106,7 +7106,7 @@
             </a:pPr>
             <a:r>
               <a:rPr/>
-              <a:t>If 1+ is “no”: refine or pick a backup. A subject that fails this test produces a thin capstone.</a:t>
+              <a:t>If 1+ is “no”: narrow the slice. Trying to specify the whole platform produces a thin capstone.</a:t>
             </a:r>
           </a:p>
         </p:txBody>
@@ -7153,7 +7153,7 @@
             </a:pPr>
             <a:r>
               <a:rPr/>
-              <a:t>👥 Activity 1 — Subject Confirmation</a:t>
+              <a:t>👥 Activity 1 — Holocron Scoping</a:t>
             </a:r>
           </a:p>
         </p:txBody>
@@ -7190,25 +7190,25 @@
             </a:pPr>
             <a:r>
               <a:rPr/>
-              <a:t>5 min: re-read declared candidate</a:t>
-            </a:r>
-          </a:p>
-          <a:p>
-            <a:pPr lvl="0" indent="0" marL="0">
-              <a:buNone/>
-            </a:pPr>
-            <a:r>
-              <a:rPr/>
-              <a:t>15 min: 5-question fit test</a:t>
-            </a:r>
-          </a:p>
-          <a:p>
-            <a:pPr lvl="0" indent="0" marL="0">
-              <a:buNone/>
-            </a:pPr>
-            <a:r>
-              <a:rPr/>
-              <a:t>10 min: adjust or commit</a:t>
+              <a:t>5 min: re-read the problem brief</a:t>
+            </a:r>
+          </a:p>
+          <a:p>
+            <a:pPr lvl="0" indent="0" marL="0">
+              <a:buNone/>
+            </a:pPr>
+            <a:r>
+              <a:rPr/>
+              <a:t>15 min: 5-question scoping test</a:t>
+            </a:r>
+          </a:p>
+          <a:p>
+            <a:pPr lvl="0" indent="0" marL="0">
+              <a:buNone/>
+            </a:pPr>
+            <a:r>
+              <a:rPr/>
+              <a:t>10 min: draw the in/out scope line</a:t>
             </a:r>
           </a:p>
           <a:p>

--- a/week-08/presentations/ppts/day-01-ai-spec-development.pptx
+++ b/week-08/presentations/ppts/day-01-ai-spec-development.pptx
@@ -6141,6 +6141,43 @@
             <a:r>
               <a:rPr/>
               <a:t>🤖 Capstone Plan AI Check</a:t>
+            </a:r>
+          </a:p>
+        </p:txBody>
+      </p:sp>
+      <p:sp>
+        <p:nvSpPr>
+          <p:cNvPr id="3" name="Content Placeholder 2"/>
+          <p:cNvSpPr>
+            <a:spLocks noGrp="1"/>
+          </p:cNvSpPr>
+          <p:nvPr>
+            <p:ph idx="1"/>
+          </p:nvPr>
+        </p:nvSpPr>
+        <p:spPr/>
+        <p:txBody>
+          <a:bodyPr/>
+          <a:lstStyle/>
+          <a:p>
+            <a:pPr lvl="0" indent="0">
+              <a:buNone/>
+            </a:pPr>
+            <a:r>
+              <a:rPr>
+                <a:latin typeface="Courier"/>
+              </a:rPr>
+              <a:t>Role: Capstone advisor for a TPM cohort.
+Context: &lt;Holocron scope slice + 5-question scoping assessment +
+declared inputs needed&gt;
+Task: Identify 3 risks in the capstone plan:
+1. A customer signal source likely insufficient
+2. A scope dimension likely too ambitious for 4 days
+3. A stakeholder whose buy-in we'll need but didn't list
+Constraints:
+- Be specific to the subject given
+- Suggest a concrete adjustment per risk
+Format: 3 numbered findings.</a:t>
             </a:r>
           </a:p>
         </p:txBody>

--- a/week-08/presentations/ppts/day-01-ai-spec-development.pptx
+++ b/week-08/presentations/ppts/day-01-ai-spec-development.pptx
@@ -790,7 +790,7 @@
             </a:pPr>
             <a:r>
               <a:rPr/>
-              <a:t>Triads who try to run all 5 in parallel break the validation chain.</a:t>
+              <a:t>Quads who try to run all 5 in parallel break the validation chain.</a:t>
             </a:r>
           </a:p>
         </p:txBody>
@@ -954,7 +954,7 @@
             </a:pPr>
             <a:r>
               <a:rPr/>
-              <a:t>Validation is mandatory. If a triad skips it, redirect.</a:t>
+              <a:t>Validation is mandatory. If a quad skips it, redirect.</a:t>
             </a:r>
           </a:p>
         </p:txBody>
@@ -1446,7 +1446,7 @@
             </a:pPr>
             <a:r>
               <a:rPr/>
-              <a:t>By 16:00, every triad has the AI Spec pattern installed + a locked Holocron scope slice + a discovery plan.</a:t>
+              <a:t>By 16:00, every quad has the AI Spec pattern installed + a locked Holocron scope slice + a discovery plan.</a:t>
             </a:r>
           </a:p>
         </p:txBody>
@@ -1856,7 +1856,7 @@
             </a:pPr>
             <a:r>
               <a:rPr/>
-              <a:t>If a triad needs to switch to a backup, that’s success. Better than thin capstone.</a:t>
+              <a:t>If a quad needs to switch to a backup, that’s success. Better than thin capstone.</a:t>
             </a:r>
           </a:p>
         </p:txBody>
@@ -5346,7 +5346,7 @@
             </a:pPr>
             <a:r>
               <a:rPr b="1"/>
-              <a:t>Triads • 40 minutes</a:t>
+              <a:t>Quads • 40 minutes</a:t>
             </a:r>
           </a:p>
           <a:p>
@@ -5883,7 +5883,7 @@
             </a:pPr>
             <a:r>
               <a:rPr b="1"/>
-              <a:t>Triads • 40 minutes</a:t>
+              <a:t>Quads • 40 minutes</a:t>
             </a:r>
           </a:p>
           <a:p>
@@ -6252,7 +6252,7 @@
             </a:pPr>
             <a:r>
               <a:rPr b="1"/>
-              <a:t>Triads • 45 minutes • Wrap</a:t>
+              <a:t>Quads • 45 minutes • Wrap</a:t>
             </a:r>
           </a:p>
           <a:p>
@@ -6270,7 +6270,7 @@
             </a:pPr>
             <a:r>
               <a:rPr/>
-              <a:t>10 min: distribute work across triad</a:t>
+              <a:t>10 min: distribute work across quad</a:t>
             </a:r>
           </a:p>
           <a:p>
@@ -7218,7 +7218,7 @@
             </a:pPr>
             <a:r>
               <a:rPr b="1"/>
-              <a:t>Triads • 35 minutes</a:t>
+              <a:t>Quads • 35 minutes</a:t>
             </a:r>
           </a:p>
           <a:p>

--- a/week-08/presentations/ppts/day-01-ai-spec-development.pptx
+++ b/week-08/presentations/ppts/day-01-ai-spec-development.pptx
@@ -5346,7 +5346,7 @@
             </a:pPr>
             <a:r>
               <a:rPr b="1"/>
-              <a:t>Quads • 40 minutes</a:t>
+              <a:t>Quads • 50 minutes</a:t>
             </a:r>
           </a:p>
           <a:p>
@@ -5883,7 +5883,7 @@
             </a:pPr>
             <a:r>
               <a:rPr b="1"/>
-              <a:t>Quads • 40 minutes</a:t>
+              <a:t>Quads • 50 minutes</a:t>
             </a:r>
           </a:p>
           <a:p>
@@ -6252,7 +6252,7 @@
             </a:pPr>
             <a:r>
               <a:rPr b="1"/>
-              <a:t>Quads • 45 minutes • Wrap</a:t>
+              <a:t>Quads • 55 minutes • Wrap</a:t>
             </a:r>
           </a:p>
           <a:p>
@@ -7218,7 +7218,7 @@
             </a:pPr>
             <a:r>
               <a:rPr b="1"/>
-              <a:t>Quads • 35 minutes</a:t>
+              <a:t>Quads • 45 minutes</a:t>
             </a:r>
           </a:p>
           <a:p>

--- a/week-08/presentations/ppts/day-01-ai-spec-development.pptx
+++ b/week-08/presentations/ppts/day-01-ai-spec-development.pptx
@@ -5364,7 +5364,7 @@
             </a:pPr>
             <a:r>
               <a:rPr/>
-              <a:t>30 min: walk each section, map to input artifacts</a:t>
+              <a:t>40 min: walk each section, map to input artifacts</a:t>
             </a:r>
           </a:p>
           <a:p>
@@ -5382,7 +5382,7 @@
             </a:pPr>
             <a:r>
               <a:rPr/>
-              <a:t>⏱ 5 + 30 + 5</a:t>
+              <a:t>⏱ 5 + 40 + 5</a:t>
             </a:r>
           </a:p>
         </p:txBody>
@@ -5892,7 +5892,7 @@
             </a:pPr>
             <a:r>
               <a:rPr/>
-              <a:t>30 min: run 5 prompts in sequence; validate each output</a:t>
+              <a:t>40 min: run 5 prompts in sequence; validate each output</a:t>
             </a:r>
           </a:p>
           <a:p>
@@ -5910,7 +5910,7 @@
             </a:pPr>
             <a:r>
               <a:rPr/>
-              <a:t>⏱ 30 + 10</a:t>
+              <a:t>⏱ 40 + 10</a:t>
             </a:r>
           </a:p>
         </p:txBody>
@@ -6261,7 +6261,7 @@
             </a:pPr>
             <a:r>
               <a:rPr/>
-              <a:t>10 min: list inputs needed (4 categories)</a:t>
+              <a:t>20 min: list inputs needed (4 categories)</a:t>
             </a:r>
           </a:p>
           <a:p>
@@ -6306,7 +6306,7 @@
             </a:pPr>
             <a:r>
               <a:rPr/>
-              <a:t>⏱ 10 + 10 + 5 + 10 + 10 · 15-min wrap</a:t>
+              <a:t>⏱ 20 + 10 + 5 + 10 + 10 · 15-min wrap</a:t>
             </a:r>
           </a:p>
         </p:txBody>
@@ -7236,7 +7236,7 @@
             </a:pPr>
             <a:r>
               <a:rPr/>
-              <a:t>15 min: 5-question scoping test</a:t>
+              <a:t>25 min: 5-question scoping test</a:t>
             </a:r>
           </a:p>
           <a:p>
@@ -7263,7 +7263,7 @@
             </a:pPr>
             <a:r>
               <a:rPr/>
-              <a:t>⏱ 5 + 15 + 10 + 5</a:t>
+              <a:t>⏱ 5 + 25 + 10 + 5</a:t>
             </a:r>
           </a:p>
         </p:txBody>
